--- a/uploads/basic_template.pptx
+++ b/uploads/basic_template.pptx
@@ -120,6 +120,7 @@
 <p1510:revInfo xmlns:a="http://schemas.openxmlformats.org/drawingml/2006/main" xmlns:r="http://schemas.openxmlformats.org/officeDocument/2006/relationships" xmlns:p1510="http://schemas.microsoft.com/office/powerpoint/2015/10/main">
   <p1510:revLst>
     <p1510:client id="{18E4E016-EFFC-456B-9C24-9916A4908C2E}" v="1" dt="2026-06-01T16:41:39.639"/>
+    <p1510:client id="{711ECE26-EEF7-4FE9-980E-31764A741CA1}" v="3" dt="2026-06-02T10:44:24.618"/>
   </p1510:revLst>
 </p1510:revInfo>
 </file>
@@ -372,7 +373,7 @@
           <a:p>
             <a:fld id="{395357C0-6E0D-46EB-9F8F-43803F348F24}" type="datetime1">
               <a:rPr lang="en-US" smtClean="0"/>
-              <a:t>6/1/2026</a:t>
+              <a:t>6/2/2026</a:t>
             </a:fld>
             <a:endParaRPr lang="en-US"/>
           </a:p>
@@ -819,7 +820,7 @@
           <a:p>
             <a:fld id="{395056F1-F5E2-4ED8-9ED2-B4DCC32FE4B1}" type="datetime1">
               <a:rPr lang="en-US" smtClean="0"/>
-              <a:t>6/1/2026</a:t>
+              <a:t>6/2/2026</a:t>
             </a:fld>
             <a:endParaRPr lang="en-US"/>
           </a:p>
@@ -1085,7 +1086,7 @@
           <a:p>
             <a:fld id="{87333073-65C1-4CC7-BBE7-8F5A3AFB183B}" type="datetime1">
               <a:rPr lang="en-US" smtClean="0"/>
-              <a:t>6/1/2026</a:t>
+              <a:t>6/2/2026</a:t>
             </a:fld>
             <a:endParaRPr lang="en-US"/>
           </a:p>
@@ -1498,7 +1499,7 @@
           <a:p>
             <a:fld id="{EE872102-C255-4B2E-9A7E-2603C5FAD6D4}" type="datetime1">
               <a:rPr lang="en-US" smtClean="0"/>
-              <a:t>6/1/2026</a:t>
+              <a:t>6/2/2026</a:t>
             </a:fld>
             <a:endParaRPr lang="en-US"/>
           </a:p>
@@ -1832,7 +1833,7 @@
           <a:p>
             <a:fld id="{5070A7D6-92E1-4CDF-BD2F-79F298197135}" type="datetime1">
               <a:rPr lang="en-US" smtClean="0"/>
-              <a:t>6/1/2026</a:t>
+              <a:t>6/2/2026</a:t>
             </a:fld>
             <a:endParaRPr lang="en-US"/>
           </a:p>
@@ -2050,7 +2051,7 @@
           <a:p>
             <a:fld id="{FFBEE3B3-6EA8-4914-BDAC-89234BD2AD09}" type="datetime1">
               <a:rPr lang="en-US" smtClean="0"/>
-              <a:t>6/1/2026</a:t>
+              <a:t>6/2/2026</a:t>
             </a:fld>
             <a:endParaRPr lang="en-US"/>
           </a:p>
@@ -2313,7 +2314,7 @@
           <a:p>
             <a:fld id="{32BB48EB-6AF5-4207-A153-D1AA963F0AC1}" type="datetime1">
               <a:rPr lang="en-US" smtClean="0"/>
-              <a:t>6/1/2026</a:t>
+              <a:t>6/2/2026</a:t>
             </a:fld>
             <a:endParaRPr lang="en-US"/>
           </a:p>
@@ -2576,7 +2577,7 @@
           <a:p>
             <a:fld id="{C0016614-595C-443F-AE20-86D2AC6A0013}" type="datetime1">
               <a:rPr lang="en-US" smtClean="0"/>
-              <a:t>6/1/2026</a:t>
+              <a:t>6/2/2026</a:t>
             </a:fld>
             <a:endParaRPr lang="en-US"/>
           </a:p>
@@ -2839,7 +2840,7 @@
           <a:p>
             <a:fld id="{37FC8A85-8FD1-45F0-99DE-E338DC5235BC}" type="datetime1">
               <a:rPr lang="en-US" smtClean="0"/>
-              <a:t>6/1/2026</a:t>
+              <a:t>6/2/2026</a:t>
             </a:fld>
             <a:endParaRPr lang="en-US"/>
           </a:p>
@@ -3171,7 +3172,7 @@
           <a:p>
             <a:fld id="{392DEB38-22AD-484B-BEB1-12B18D8CEE64}" type="datetime1">
               <a:rPr lang="en-US" smtClean="0"/>
-              <a:t>6/1/2026</a:t>
+              <a:t>6/2/2026</a:t>
             </a:fld>
             <a:endParaRPr lang="en-US"/>
           </a:p>
@@ -3533,7 +3534,7 @@
           <a:p>
             <a:fld id="{957C2DDA-91DD-4B15-B0D6-0E3634C6CC2A}" type="datetime1">
               <a:rPr lang="en-US" smtClean="0"/>
-              <a:t>6/1/2026</a:t>
+              <a:t>6/2/2026</a:t>
             </a:fld>
             <a:endParaRPr lang="en-US"/>
           </a:p>
@@ -3796,7 +3797,7 @@
           <a:p>
             <a:fld id="{3C889C35-F31B-4EAB-A4E6-687A63844314}" type="datetime1">
               <a:rPr lang="en-US" smtClean="0"/>
-              <a:t>6/1/2026</a:t>
+              <a:t>6/2/2026</a:t>
             </a:fld>
             <a:endParaRPr lang="en-US"/>
           </a:p>
@@ -4113,7 +4114,7 @@
           <a:p>
             <a:fld id="{2217B7B5-5BBE-40BC-B471-E2BA9D71AA0E}" type="datetime1">
               <a:rPr lang="en-US" smtClean="0"/>
-              <a:t>6/1/2026</a:t>
+              <a:t>6/2/2026</a:t>
             </a:fld>
             <a:endParaRPr lang="en-US"/>
           </a:p>
@@ -4429,7 +4430,7 @@
           <a:p>
             <a:fld id="{EF607E7C-B760-45A7-AB98-EEAB39EBFFA9}" type="datetime1">
               <a:rPr lang="en-US" smtClean="0"/>
-              <a:t>6/1/2026</a:t>
+              <a:t>6/2/2026</a:t>
             </a:fld>
             <a:endParaRPr lang="en-US"/>
           </a:p>
@@ -4750,7 +4751,7 @@
           <a:p>
             <a:fld id="{C4680711-5BFA-4199-BAD0-B0C15B04A070}" type="datetime1">
               <a:rPr lang="en-US" smtClean="0"/>
-              <a:t>6/1/2026</a:t>
+              <a:t>6/2/2026</a:t>
             </a:fld>
             <a:endParaRPr lang="en-US"/>
           </a:p>
@@ -5066,7 +5067,7 @@
           <a:p>
             <a:fld id="{20C9332B-92F1-4946-B218-9926114AAEA1}" type="datetime1">
               <a:rPr lang="en-US" smtClean="0"/>
-              <a:t>6/1/2026</a:t>
+              <a:t>6/2/2026</a:t>
             </a:fld>
             <a:endParaRPr lang="en-US"/>
           </a:p>
@@ -5382,7 +5383,7 @@
           <a:p>
             <a:fld id="{E2F630AA-266B-4EED-8F37-1EEA7BB36798}" type="datetime1">
               <a:rPr lang="en-US" smtClean="0"/>
-              <a:t>6/1/2026</a:t>
+              <a:t>6/2/2026</a:t>
             </a:fld>
             <a:endParaRPr lang="en-US"/>
           </a:p>
@@ -5724,7 +5725,7 @@
           <a:p>
             <a:fld id="{A2E4BA8A-8D99-4942-A6AE-3429BB81C9B0}" type="datetime1">
               <a:rPr lang="en-US" smtClean="0"/>
-              <a:t>6/1/2026</a:t>
+              <a:t>6/2/2026</a:t>
             </a:fld>
             <a:endParaRPr lang="en-US"/>
           </a:p>
@@ -6046,7 +6047,7 @@
           <a:p>
             <a:fld id="{5BCB8B90-98AD-44EA-88CB-87E0482D47C5}" type="datetime1">
               <a:rPr lang="en-US" smtClean="0"/>
-              <a:t>6/1/2026</a:t>
+              <a:t>6/2/2026</a:t>
             </a:fld>
             <a:endParaRPr lang="en-US"/>
           </a:p>
@@ -6386,7 +6387,7 @@
           <a:p>
             <a:fld id="{0672E3CE-9562-4779-875D-570AC5656D0F}" type="datetime1">
               <a:rPr lang="en-US" smtClean="0"/>
-              <a:t>6/1/2026</a:t>
+              <a:t>6/2/2026</a:t>
             </a:fld>
             <a:endParaRPr lang="en-US"/>
           </a:p>
@@ -6723,7 +6724,7 @@
           <a:p>
             <a:fld id="{BF4D8B86-78FA-4747-9401-2399B1893341}" type="datetime1">
               <a:rPr lang="en-US" smtClean="0"/>
-              <a:t>6/1/2026</a:t>
+              <a:t>6/2/2026</a:t>
             </a:fld>
             <a:endParaRPr lang="en-US"/>
           </a:p>
@@ -7110,7 +7111,7 @@
           <a:p>
             <a:fld id="{55ECC63D-CDB3-4317-A945-BF72F7BF98EB}" type="datetime1">
               <a:rPr lang="en-US" smtClean="0"/>
-              <a:t>6/1/2026</a:t>
+              <a:t>6/2/2026</a:t>
             </a:fld>
             <a:endParaRPr lang="en-US"/>
           </a:p>
@@ -7704,7 +7705,7 @@
           <a:p>
             <a:fld id="{AAD51419-3F0D-4A1E-BC8B-A018756B4625}" type="datetime1">
               <a:rPr lang="en-US" smtClean="0"/>
-              <a:t>6/1/2026</a:t>
+              <a:t>6/2/2026</a:t>
             </a:fld>
             <a:endParaRPr lang="en-US"/>
           </a:p>
@@ -8106,7 +8107,7 @@
           <a:p>
             <a:fld id="{F1B6FEA0-B839-4598-B2DD-445068A8396C}" type="datetime1">
               <a:rPr lang="en-US" smtClean="0"/>
-              <a:t>6/1/2026</a:t>
+              <a:t>6/2/2026</a:t>
             </a:fld>
             <a:endParaRPr lang="en-US"/>
           </a:p>
@@ -8398,7 +8399,7 @@
           <a:p>
             <a:fld id="{BF024032-45C2-4C36-A7D1-3A3BD65AF0CF}" type="datetime1">
               <a:rPr lang="en-US" smtClean="0"/>
-              <a:t>6/1/2026</a:t>
+              <a:t>6/2/2026</a:t>
             </a:fld>
             <a:endParaRPr lang="en-US"/>
           </a:p>
@@ -8690,7 +8691,7 @@
           <a:p>
             <a:fld id="{70D67178-055F-49DC-969F-AB374B7A5758}" type="datetime1">
               <a:rPr lang="en-US" smtClean="0"/>
-              <a:t>6/1/2026</a:t>
+              <a:t>6/2/2026</a:t>
             </a:fld>
             <a:endParaRPr lang="en-US"/>
           </a:p>
@@ -9006,7 +9007,7 @@
           <a:p>
             <a:fld id="{85436D6D-18C4-497A-81D8-87B6E0BF7395}" type="datetime1">
               <a:rPr lang="en-US" smtClean="0"/>
-              <a:t>6/1/2026</a:t>
+              <a:t>6/2/2026</a:t>
             </a:fld>
             <a:endParaRPr lang="en-US"/>
           </a:p>
@@ -9327,7 +9328,7 @@
           <a:p>
             <a:fld id="{51CE585B-D50B-46C7-90D5-F8C248FB96B3}" type="datetime1">
               <a:rPr lang="en-US" smtClean="0"/>
-              <a:t>6/1/2026</a:t>
+              <a:t>6/2/2026</a:t>
             </a:fld>
             <a:endParaRPr lang="en-US"/>
           </a:p>
@@ -9598,7 +9599,7 @@
           <a:p>
             <a:fld id="{BFA9687D-6191-4AD9-82A2-1B737232915B}" type="datetime1">
               <a:rPr lang="en-US" smtClean="0"/>
-              <a:t>6/1/2026</a:t>
+              <a:t>6/2/2026</a:t>
             </a:fld>
             <a:endParaRPr lang="en-US"/>
           </a:p>
@@ -9950,7 +9951,7 @@
           <a:p>
             <a:fld id="{5F2E741A-92DD-45DF-8212-2D8EB227508B}" type="datetime1">
               <a:rPr lang="en-US" smtClean="0"/>
-              <a:t>6/1/2026</a:t>
+              <a:t>6/2/2026</a:t>
             </a:fld>
             <a:endParaRPr lang="en-US"/>
           </a:p>
@@ -10323,7 +10324,7 @@
           <a:p>
             <a:fld id="{613F8E84-C221-42E2-A88F-FC6CBC7F05E7}" type="datetime1">
               <a:rPr lang="en-US" smtClean="0"/>
-              <a:t>6/1/2026</a:t>
+              <a:t>6/2/2026</a:t>
             </a:fld>
             <a:endParaRPr lang="en-US"/>
           </a:p>
@@ -10676,7 +10677,7 @@
           <a:p>
             <a:fld id="{34DFD6AF-0F92-4F71-9576-F6847C4CFE31}" type="datetime1">
               <a:rPr lang="en-US" smtClean="0"/>
-              <a:t>6/1/2026</a:t>
+              <a:t>6/2/2026</a:t>
             </a:fld>
             <a:endParaRPr lang="en-US"/>
           </a:p>
@@ -11052,7 +11053,7 @@
           <a:p>
             <a:fld id="{028211E3-7798-4C1B-A8B7-1D4CC8744C3E}" type="datetime1">
               <a:rPr lang="en-US" smtClean="0"/>
-              <a:t>6/1/2026</a:t>
+              <a:t>6/2/2026</a:t>
             </a:fld>
             <a:endParaRPr lang="en-US"/>
           </a:p>
@@ -11584,7 +11585,7 @@
           <a:p>
             <a:fld id="{DB416C6F-BD23-48A3-9D04-6B6FEC3702B5}" type="datetime1">
               <a:rPr lang="en-US" smtClean="0"/>
-              <a:t>6/1/2026</a:t>
+              <a:t>6/2/2026</a:t>
             </a:fld>
             <a:endParaRPr lang="en-US"/>
           </a:p>
@@ -11888,7 +11889,7 @@
           <a:p>
             <a:fld id="{2D89B1FA-A3A2-4EEE-AC52-74345FF796E0}" type="datetime1">
               <a:rPr lang="en-US" smtClean="0"/>
-              <a:t>6/1/2026</a:t>
+              <a:t>6/2/2026</a:t>
             </a:fld>
             <a:endParaRPr lang="en-US"/>
           </a:p>
@@ -12253,7 +12254,7 @@
           <a:p>
             <a:fld id="{8CB0E27F-4DA4-4250-AB3F-755F95A702F0}" type="datetime1">
               <a:rPr lang="en-US" smtClean="0"/>
-              <a:t>6/1/2026</a:t>
+              <a:t>6/2/2026</a:t>
             </a:fld>
             <a:endParaRPr lang="en-US"/>
           </a:p>
@@ -12605,7 +12606,7 @@
           <a:p>
             <a:fld id="{281718C3-C21D-4CB2-9429-434651DA51E0}" type="datetime1">
               <a:rPr lang="en-US" smtClean="0"/>
-              <a:t>6/1/2026</a:t>
+              <a:t>6/2/2026</a:t>
             </a:fld>
             <a:endParaRPr lang="en-US"/>
           </a:p>
@@ -12903,7 +12904,7 @@
           <a:p>
             <a:fld id="{EF484BAB-BC70-496F-BE5F-77C3800258C1}" type="datetime1">
               <a:rPr lang="en-US" smtClean="0"/>
-              <a:t>6/1/2026</a:t>
+              <a:t>6/2/2026</a:t>
             </a:fld>
             <a:endParaRPr lang="en-US"/>
           </a:p>
@@ -13243,7 +13244,7 @@
           <a:p>
             <a:fld id="{9245940F-B015-464A-92BD-FC8709C093C5}" type="datetime1">
               <a:rPr lang="en-US" smtClean="0"/>
-              <a:t>6/1/2026</a:t>
+              <a:t>6/2/2026</a:t>
             </a:fld>
             <a:endParaRPr lang="en-US"/>
           </a:p>
@@ -13664,7 +13665,7 @@
           <a:p>
             <a:fld id="{8E6C2023-0583-4B96-882C-68D22DCD46B6}" type="datetime1">
               <a:rPr lang="en-US" smtClean="0"/>
-              <a:t>6/1/2026</a:t>
+              <a:t>6/2/2026</a:t>
             </a:fld>
             <a:endParaRPr lang="en-US"/>
           </a:p>
@@ -14082,7 +14083,7 @@
           <a:p>
             <a:fld id="{6504A9F1-814E-44B0-83E3-9DA02F3C243F}" type="datetime1">
               <a:rPr lang="en-US" smtClean="0"/>
-              <a:t>6/1/2026</a:t>
+              <a:t>6/2/2026</a:t>
             </a:fld>
             <a:endParaRPr lang="en-US"/>
           </a:p>
@@ -14564,7 +14565,7 @@
           <a:p>
             <a:fld id="{6DF15078-AEDD-4B5A-AC6A-C8F87F9646E7}" type="datetime1">
               <a:rPr lang="en-US" smtClean="0"/>
-              <a:t>6/1/2026</a:t>
+              <a:t>6/2/2026</a:t>
             </a:fld>
             <a:endParaRPr lang="en-US"/>
           </a:p>
@@ -14759,7 +14760,7 @@
           <a:p>
             <a:fld id="{51B2758D-8EE6-4CC5-A170-BE9501D7BCFF}" type="datetime1">
               <a:rPr lang="en-US" smtClean="0"/>
-              <a:t>6/1/2026</a:t>
+              <a:t>6/2/2026</a:t>
             </a:fld>
             <a:endParaRPr lang="en-US"/>
           </a:p>
@@ -14880,7 +14881,7 @@
           <a:p>
             <a:fld id="{0FCB484E-FEE6-4572-A5E5-40AFA2254CF8}" type="datetime1">
               <a:rPr lang="en-US" smtClean="0"/>
-              <a:t>6/1/2026</a:t>
+              <a:t>6/2/2026</a:t>
             </a:fld>
             <a:endParaRPr lang="en-US"/>
           </a:p>
@@ -15223,7 +15224,7 @@
           <a:p>
             <a:fld id="{C135F28A-0986-4E7B-B35D-341D39FBD191}" type="datetime1">
               <a:rPr lang="en-US" smtClean="0"/>
-              <a:t>6/1/2026</a:t>
+              <a:t>6/2/2026</a:t>
             </a:fld>
             <a:endParaRPr lang="en-US"/>
           </a:p>
@@ -15534,7 +15535,7 @@
           <a:p>
             <a:fld id="{A57FC195-9048-4969-9920-6939BE28AE8D}" type="datetime1">
               <a:rPr lang="en-US" smtClean="0"/>
-              <a:t>6/1/2026</a:t>
+              <a:t>6/2/2026</a:t>
             </a:fld>
             <a:endParaRPr lang="en-US"/>
           </a:p>
@@ -15820,7 +15821,7 @@
           <a:p>
             <a:fld id="{8CCE6180-3A1B-4424-AB9F-671C4EBC0A2E}" type="datetime1">
               <a:rPr lang="en-US" smtClean="0"/>
-              <a:t>6/1/2026</a:t>
+              <a:t>6/2/2026</a:t>
             </a:fld>
             <a:endParaRPr lang="en-US" dirty="0"/>
           </a:p>
@@ -16116,7 +16117,7 @@
           <a:p>
             <a:fld id="{E2C22330-A382-475A-8519-6A39191EC88E}" type="datetime1">
               <a:rPr lang="en-US" smtClean="0"/>
-              <a:t>6/1/2026</a:t>
+              <a:t>6/2/2026</a:t>
             </a:fld>
             <a:endParaRPr lang="en-US"/>
           </a:p>
@@ -16412,7 +16413,7 @@
           <a:p>
             <a:fld id="{6E20DC0D-99C6-4F09-90C7-C0EC6E2F0A06}" type="datetime1">
               <a:rPr lang="en-US" smtClean="0"/>
-              <a:t>6/1/2026</a:t>
+              <a:t>6/2/2026</a:t>
             </a:fld>
             <a:endParaRPr lang="en-US"/>
           </a:p>
@@ -16665,7 +16666,7 @@
           <a:p>
             <a:fld id="{DD9686BE-81E0-4285-A95D-6934CDF6209E}" type="datetime1">
               <a:rPr lang="en-US" smtClean="0"/>
-              <a:t>6/1/2026</a:t>
+              <a:t>6/2/2026</a:t>
             </a:fld>
             <a:endParaRPr lang="en-US"/>
           </a:p>
@@ -16918,7 +16919,7 @@
           <a:p>
             <a:fld id="{EB464E07-DAE2-4D6D-BDD9-1CE7637F446D}" type="datetime1">
               <a:rPr lang="en-US" smtClean="0"/>
-              <a:t>6/1/2026</a:t>
+              <a:t>6/2/2026</a:t>
             </a:fld>
             <a:endParaRPr lang="en-US"/>
           </a:p>
@@ -17239,7 +17240,7 @@
           <a:p>
             <a:fld id="{531D259D-9AB9-44BA-8FCD-FE201F91B5A0}" type="datetime1">
               <a:rPr lang="en-US" smtClean="0"/>
-              <a:t>6/1/2026</a:t>
+              <a:t>6/2/2026</a:t>
             </a:fld>
             <a:endParaRPr lang="en-US"/>
           </a:p>
@@ -17560,7 +17561,7 @@
           <a:p>
             <a:fld id="{74EB0658-C877-4D58-A83B-07BEE0E4C7B4}" type="datetime1">
               <a:rPr lang="en-US" smtClean="0"/>
-              <a:t>6/1/2026</a:t>
+              <a:t>6/2/2026</a:t>
             </a:fld>
             <a:endParaRPr lang="en-US"/>
           </a:p>
@@ -17966,7 +17967,7 @@
           <a:p>
             <a:fld id="{ECD290D4-E5CF-428F-801F-3741FA4FB792}" type="datetime1">
               <a:rPr lang="en-US" smtClean="0"/>
-              <a:t>6/1/2026</a:t>
+              <a:t>6/2/2026</a:t>
             </a:fld>
             <a:endParaRPr lang="en-US"/>
           </a:p>
@@ -18561,56 +18562,6 @@
           <a:chExt cx="0" cy="0"/>
         </a:xfrm>
       </p:grpSpPr>
-      <p:sp>
-        <p:nvSpPr>
-          <p:cNvPr id="2" name="Title 1">
-            <a:extLst>
-              <a:ext uri="{FF2B5EF4-FFF2-40B4-BE49-F238E27FC236}">
-                <a16:creationId xmlns:a16="http://schemas.microsoft.com/office/drawing/2014/main" id="{F4D3D0DF-F7D1-2047-467E-C87AF84BF14C}"/>
-              </a:ext>
-            </a:extLst>
-          </p:cNvPr>
-          <p:cNvSpPr>
-            <a:spLocks noGrp="1"/>
-          </p:cNvSpPr>
-          <p:nvPr>
-            <p:ph type="title"/>
-          </p:nvPr>
-        </p:nvSpPr>
-        <p:spPr/>
-        <p:txBody>
-          <a:bodyPr/>
-          <a:lstStyle/>
-          <a:p>
-            <a:endParaRPr lang="en-GB"/>
-          </a:p>
-        </p:txBody>
-      </p:sp>
-      <p:sp>
-        <p:nvSpPr>
-          <p:cNvPr id="3" name="Content Placeholder 2">
-            <a:extLst>
-              <a:ext uri="{FF2B5EF4-FFF2-40B4-BE49-F238E27FC236}">
-                <a16:creationId xmlns:a16="http://schemas.microsoft.com/office/drawing/2014/main" id="{900FCC7D-CB93-176F-A0EE-6A28BFAE75C9}"/>
-              </a:ext>
-            </a:extLst>
-          </p:cNvPr>
-          <p:cNvSpPr>
-            <a:spLocks noGrp="1"/>
-          </p:cNvSpPr>
-          <p:nvPr>
-            <p:ph idx="1"/>
-          </p:nvPr>
-        </p:nvSpPr>
-        <p:spPr/>
-        <p:txBody>
-          <a:bodyPr/>
-          <a:lstStyle/>
-          <a:p>
-            <a:endParaRPr lang="en-GB"/>
-          </a:p>
-        </p:txBody>
-      </p:sp>
     </p:spTree>
     <p:extLst>
       <p:ext uri="{BB962C8B-B14F-4D97-AF65-F5344CB8AC3E}">
@@ -18846,6 +18797,15 @@
 </file>
 
 <file path=customXml/item1.xml><?xml version="1.0" encoding="utf-8"?>
+<?mso-contentType ?>
+<FormTemplates xmlns="http://schemas.microsoft.com/sharepoint/v3/contenttype/forms">
+  <Display>DocumentLibraryForm</Display>
+  <Edit>DocumentLibraryForm</Edit>
+  <New>DocumentLibraryForm</New>
+</FormTemplates>
+</file>
+
+<file path=customXml/item2.xml><?xml version="1.0" encoding="utf-8"?>
 <ct:contentTypeSchema xmlns:ct="http://schemas.microsoft.com/office/2006/metadata/contentType" xmlns:ma="http://schemas.microsoft.com/office/2006/metadata/properties/metaAttributes" ct:_="" ma:_="" ma:contentTypeName="Document" ma:contentTypeID="0x01010079F111ED35F8CC479449609E8A0923A6" ma:contentTypeVersion="30" ma:contentTypeDescription="Create a new document." ma:contentTypeScope="" ma:versionID="cec0622158e8f13124e9e8fd4de31bd1">
   <xsd:schema xmlns:xsd="http://www.w3.org/2001/XMLSchema" xmlns:xs="http://www.w3.org/2001/XMLSchema" xmlns:p="http://schemas.microsoft.com/office/2006/metadata/properties" xmlns:ns1="http://schemas.microsoft.com/sharepoint/v3" xmlns:ns2="71af3243-3dd4-4a8d-8c0d-dd76da1f02a5" xmlns:ns3="16c05727-aa75-4e4a-9b5f-8a80a1165891" xmlns:ns4="230e9df3-be65-4c73-a93b-d1236ebd677e" targetNamespace="http://schemas.microsoft.com/office/2006/metadata/properties" ma:root="true" ma:fieldsID="3b52f30ab005d15df08657af532e6e38" ns1:_="" ns2:_="" ns3:_="" ns4:_="">
     <xsd:import namespace="http://schemas.microsoft.com/sharepoint/v3"/>
@@ -19163,15 +19123,6 @@
 </ct:contentTypeSchema>
 </file>
 
-<file path=customXml/item2.xml><?xml version="1.0" encoding="utf-8"?>
-<?mso-contentType ?>
-<FormTemplates xmlns="http://schemas.microsoft.com/sharepoint/v3/contenttype/forms">
-  <Display>DocumentLibraryForm</Display>
-  <Edit>DocumentLibraryForm</Edit>
-  <New>DocumentLibraryForm</New>
-</FormTemplates>
-</file>
-
 <file path=customXml/item3.xml><?xml version="1.0" encoding="utf-8"?>
 <p:properties xmlns:p="http://schemas.microsoft.com/office/2006/metadata/properties" xmlns:xsi="http://www.w3.org/2001/XMLSchema-instance" xmlns:pc="http://schemas.microsoft.com/office/infopath/2007/PartnerControls">
   <documentManagement>
@@ -19193,6 +19144,14 @@
 </file>
 
 <file path=customXml/itemProps1.xml><?xml version="1.0" encoding="utf-8"?>
+<ds:datastoreItem xmlns:ds="http://schemas.openxmlformats.org/officeDocument/2006/customXml" ds:itemID="{6DDFC564-B38B-4437-B10C-2B4F696FB123}">
+  <ds:schemaRefs>
+    <ds:schemaRef ds:uri="http://schemas.microsoft.com/sharepoint/v3/contenttype/forms"/>
+  </ds:schemaRefs>
+</ds:datastoreItem>
+</file>
+
+<file path=customXml/itemProps2.xml><?xml version="1.0" encoding="utf-8"?>
 <ds:datastoreItem xmlns:ds="http://schemas.openxmlformats.org/officeDocument/2006/customXml" ds:itemID="{2EA6ECCF-1C9D-4352-BA6F-79122165958F}">
   <ds:schemaRefs>
     <ds:schemaRef ds:uri="http://schemas.microsoft.com/office/2006/metadata/contentType"/>
@@ -19213,14 +19172,6 @@
 </ds:datastoreItem>
 </file>
 
-<file path=customXml/itemProps2.xml><?xml version="1.0" encoding="utf-8"?>
-<ds:datastoreItem xmlns:ds="http://schemas.openxmlformats.org/officeDocument/2006/customXml" ds:itemID="{6DDFC564-B38B-4437-B10C-2B4F696FB123}">
-  <ds:schemaRefs>
-    <ds:schemaRef ds:uri="http://schemas.microsoft.com/sharepoint/v3/contenttype/forms"/>
-  </ds:schemaRefs>
-</ds:datastoreItem>
-</file>
-
 <file path=customXml/itemProps3.xml><?xml version="1.0" encoding="utf-8"?>
 <ds:datastoreItem xmlns:ds="http://schemas.openxmlformats.org/officeDocument/2006/customXml" ds:itemID="{68251039-0B1C-45AD-BDF3-E784F1E00F4E}">
   <ds:schemaRefs>
